--- a/system-design-101/vi/lessons/sd-07-007/slides/sd-07-007.pptx
+++ b/system-design-101/vi/lessons/sd-07-007/slides/sd-07-007.pptx
@@ -7556,15 +7556,37 @@
               <a:buChar char="•"/>
             </a:pPr>
             <a:r>
-              <a:rPr lang="en-US" sz="2700" dirty="0" spc="9" kern="0">
-                <a:solidFill>
-                  <a:srgbClr val="F3EEE3"/>
-                </a:solidFill>
-                <a:latin typeface="Be Vietnam Pro" pitchFamily="34" charset="0"/>
-                <a:ea typeface="Be Vietnam Pro" pitchFamily="34" charset="-122"/>
-                <a:cs typeface="Be Vietnam Pro" pitchFamily="34" charset="-120"/>
-              </a:rPr>
-              <a:t>Người</a:t>
+              <a:rPr lang="en-US" sz="2700" dirty="0" spc="-7" kern="0">
+                <a:solidFill>
+                  <a:srgbClr val="F3EEE3"/>
+                </a:solidFill>
+                <a:latin typeface="Be Vietnam Pro" pitchFamily="34" charset="0"/>
+                <a:ea typeface="Be Vietnam Pro" pitchFamily="34" charset="-122"/>
+                <a:cs typeface="Be Vietnam Pro" pitchFamily="34" charset="-120"/>
+              </a:rPr>
+              <a:t>Một</a:t>
+            </a:r>
+            <a:r>
+              <a:rPr lang="en-US" sz="2700" dirty="0" spc="-12" kern="0">
+                <a:solidFill>
+                  <a:srgbClr val="F3EEE3"/>
+                </a:solidFill>
+                <a:latin typeface="Be Vietnam Pro" pitchFamily="34" charset="0"/>
+                <a:ea typeface="Be Vietnam Pro" pitchFamily="34" charset="-122"/>
+                <a:cs typeface="Be Vietnam Pro" pitchFamily="34" charset="-120"/>
+              </a:rPr>
+              <a:t> số</a:t>
+            </a:r>
+            <a:r>
+              <a:rPr lang="en-US" sz="2700" dirty="0" spc="6" kern="0">
+                <a:solidFill>
+                  <a:srgbClr val="F3EEE3"/>
+                </a:solidFill>
+                <a:latin typeface="Be Vietnam Pro" pitchFamily="34" charset="0"/>
+                <a:ea typeface="Be Vietnam Pro" pitchFamily="34" charset="-122"/>
+                <a:cs typeface="Be Vietnam Pro" pitchFamily="34" charset="-120"/>
+              </a:rPr>
+              <a:t> người</a:t>
             </a:r>
             <a:r>
               <a:rPr lang="en-US" sz="2700" dirty="0" spc="-3" kern="0">
